--- a/ppt/theorie-n2.pptx
+++ b/ppt/theorie-n2.pptx
@@ -104,6 +104,11 @@
       </a:defRPr>
     </a:lvl9pPr>
   </p:defaultTextStyle>
+  <p:extLst>
+    <p:ext uri="{EFAFB233-063F-42B5-8137-9DF3F51BA10A}">
+      <p15:sldGuideLst xmlns:p15="http://schemas.microsoft.com/office/powerpoint/2012/main"/>
+    </p:ext>
+  </p:extLst>
 </p:presentation>
 </file>
 
@@ -254,7 +259,7 @@
           <a:p>
             <a:fld id="{0C0058DA-9833-564B-95FE-A7F9C1C7E468}" type="datetimeFigureOut">
               <a:rPr lang="fr-FR" smtClean="0"/>
-              <a:t>22/09/2025</a:t>
+              <a:t>05/02/2026</a:t>
             </a:fld>
             <a:endParaRPr lang="fr-FR"/>
           </a:p>
@@ -452,7 +457,7 @@
           <a:p>
             <a:fld id="{0C0058DA-9833-564B-95FE-A7F9C1C7E468}" type="datetimeFigureOut">
               <a:rPr lang="fr-FR" smtClean="0"/>
-              <a:t>22/09/2025</a:t>
+              <a:t>05/02/2026</a:t>
             </a:fld>
             <a:endParaRPr lang="fr-FR"/>
           </a:p>
@@ -660,7 +665,7 @@
           <a:p>
             <a:fld id="{0C0058DA-9833-564B-95FE-A7F9C1C7E468}" type="datetimeFigureOut">
               <a:rPr lang="fr-FR" smtClean="0"/>
-              <a:t>22/09/2025</a:t>
+              <a:t>05/02/2026</a:t>
             </a:fld>
             <a:endParaRPr lang="fr-FR"/>
           </a:p>
@@ -858,7 +863,7 @@
           <a:p>
             <a:fld id="{0C0058DA-9833-564B-95FE-A7F9C1C7E468}" type="datetimeFigureOut">
               <a:rPr lang="fr-FR" smtClean="0"/>
-              <a:t>22/09/2025</a:t>
+              <a:t>05/02/2026</a:t>
             </a:fld>
             <a:endParaRPr lang="fr-FR"/>
           </a:p>
@@ -1133,7 +1138,7 @@
           <a:p>
             <a:fld id="{0C0058DA-9833-564B-95FE-A7F9C1C7E468}" type="datetimeFigureOut">
               <a:rPr lang="fr-FR" smtClean="0"/>
-              <a:t>22/09/2025</a:t>
+              <a:t>05/02/2026</a:t>
             </a:fld>
             <a:endParaRPr lang="fr-FR"/>
           </a:p>
@@ -1398,7 +1403,7 @@
           <a:p>
             <a:fld id="{0C0058DA-9833-564B-95FE-A7F9C1C7E468}" type="datetimeFigureOut">
               <a:rPr lang="fr-FR" smtClean="0"/>
-              <a:t>22/09/2025</a:t>
+              <a:t>05/02/2026</a:t>
             </a:fld>
             <a:endParaRPr lang="fr-FR"/>
           </a:p>
@@ -1810,7 +1815,7 @@
           <a:p>
             <a:fld id="{0C0058DA-9833-564B-95FE-A7F9C1C7E468}" type="datetimeFigureOut">
               <a:rPr lang="fr-FR" smtClean="0"/>
-              <a:t>22/09/2025</a:t>
+              <a:t>05/02/2026</a:t>
             </a:fld>
             <a:endParaRPr lang="fr-FR"/>
           </a:p>
@@ -1951,7 +1956,7 @@
           <a:p>
             <a:fld id="{0C0058DA-9833-564B-95FE-A7F9C1C7E468}" type="datetimeFigureOut">
               <a:rPr lang="fr-FR" smtClean="0"/>
-              <a:t>22/09/2025</a:t>
+              <a:t>05/02/2026</a:t>
             </a:fld>
             <a:endParaRPr lang="fr-FR"/>
           </a:p>
@@ -2064,7 +2069,7 @@
           <a:p>
             <a:fld id="{0C0058DA-9833-564B-95FE-A7F9C1C7E468}" type="datetimeFigureOut">
               <a:rPr lang="fr-FR" smtClean="0"/>
-              <a:t>22/09/2025</a:t>
+              <a:t>05/02/2026</a:t>
             </a:fld>
             <a:endParaRPr lang="fr-FR"/>
           </a:p>
@@ -2375,7 +2380,7 @@
           <a:p>
             <a:fld id="{0C0058DA-9833-564B-95FE-A7F9C1C7E468}" type="datetimeFigureOut">
               <a:rPr lang="fr-FR" smtClean="0"/>
-              <a:t>22/09/2025</a:t>
+              <a:t>05/02/2026</a:t>
             </a:fld>
             <a:endParaRPr lang="fr-FR"/>
           </a:p>
@@ -2663,7 +2668,7 @@
           <a:p>
             <a:fld id="{0C0058DA-9833-564B-95FE-A7F9C1C7E468}" type="datetimeFigureOut">
               <a:rPr lang="fr-FR" smtClean="0"/>
-              <a:t>22/09/2025</a:t>
+              <a:t>05/02/2026</a:t>
             </a:fld>
             <a:endParaRPr lang="fr-FR"/>
           </a:p>
@@ -2904,7 +2909,7 @@
           <a:p>
             <a:fld id="{0C0058DA-9833-564B-95FE-A7F9C1C7E468}" type="datetimeFigureOut">
               <a:rPr lang="fr-FR" smtClean="0"/>
-              <a:t>22/09/2025</a:t>
+              <a:t>05/02/2026</a:t>
             </a:fld>
             <a:endParaRPr lang="fr-FR"/>
           </a:p>
@@ -3403,7 +3408,7 @@
             <a:pPr algn="ctr"/>
             <a:r>
               <a:rPr lang="fr-FR" sz="2000" dirty="0"/>
-              <a:t>Physique </a:t>
+              <a:t>Physique (2 / 2h)</a:t>
             </a:r>
           </a:p>
           <a:p>
@@ -3489,7 +3494,7 @@
             <a:pPr algn="ctr"/>
             <a:r>
               <a:rPr lang="fr-FR" sz="2000" dirty="0"/>
-              <a:t>Accueil</a:t>
+              <a:t>Accueil (1 / 1h)</a:t>
             </a:r>
           </a:p>
           <a:p>
@@ -3585,7 +3590,7 @@
             <a:pPr algn="ctr"/>
             <a:r>
               <a:rPr lang="fr-FR" sz="2000" dirty="0"/>
-              <a:t>Désaturation</a:t>
+              <a:t>Désaturation (3 / 2h)</a:t>
             </a:r>
           </a:p>
           <a:p>
@@ -3681,7 +3686,7 @@
             <a:pPr algn="ctr"/>
             <a:r>
               <a:rPr lang="fr-FR" sz="2000" dirty="0"/>
-              <a:t>Accidents</a:t>
+              <a:t>Accidents (4 / 2h)</a:t>
             </a:r>
             <a:endParaRPr lang="fr-FR" dirty="0"/>
           </a:p>
@@ -3761,7 +3766,7 @@
         </p:nvSpPr>
         <p:spPr>
           <a:xfrm>
-            <a:off x="4155269" y="3211392"/>
+            <a:off x="4155268" y="3220117"/>
             <a:ext cx="2460684" cy="892552"/>
           </a:xfrm>
           <a:prstGeom prst="rect">
@@ -3788,7 +3793,7 @@
             <a:pPr algn="ctr"/>
             <a:r>
               <a:rPr lang="fr-FR" sz="2000" dirty="0"/>
-              <a:t>Matériel</a:t>
+              <a:t>Matériel (5 / 1h)</a:t>
             </a:r>
           </a:p>
           <a:p>
@@ -3854,7 +3859,7 @@
             <a:pPr algn="ctr"/>
             <a:r>
               <a:rPr lang="fr-FR" sz="2000" dirty="0"/>
-              <a:t>Comportement</a:t>
+              <a:t>Comportement (6 / 1h)</a:t>
             </a:r>
           </a:p>
           <a:p>
@@ -3903,8 +3908,8 @@
         </p:nvSpPr>
         <p:spPr>
           <a:xfrm>
-            <a:off x="4155269" y="4558944"/>
-            <a:ext cx="4182235" cy="1754326"/>
+            <a:off x="4139241" y="5725064"/>
+            <a:ext cx="3242362" cy="646331"/>
           </a:xfrm>
           <a:prstGeom prst="rect">
             <a:avLst/>
@@ -3916,70 +3921,6 @@
             <a:spAutoFit/>
           </a:bodyPr>
           <a:lstStyle/>
-          <a:p>
-            <a:r>
-              <a:rPr lang="fr-FR" dirty="0">
-                <a:solidFill>
-                  <a:schemeClr val="tx2">
-                    <a:lumMod val="75000"/>
-                    <a:lumOff val="25000"/>
-                  </a:schemeClr>
-                </a:solidFill>
-              </a:rPr>
-              <a:t>Souligner les effets de la profondeur sur:</a:t>
-            </a:r>
-          </a:p>
-          <a:p>
-            <a:pPr marL="285750" indent="-285750">
-              <a:buFont typeface="Arial" panose="020B0604020202020204" pitchFamily="34" charset="0"/>
-              <a:buChar char="•"/>
-            </a:pPr>
-            <a:r>
-              <a:rPr lang="fr-FR" dirty="0">
-                <a:solidFill>
-                  <a:schemeClr val="tx2">
-                    <a:lumMod val="75000"/>
-                    <a:lumOff val="25000"/>
-                  </a:schemeClr>
-                </a:solidFill>
-              </a:rPr>
-              <a:t>Consommation / autonomie</a:t>
-            </a:r>
-          </a:p>
-          <a:p>
-            <a:pPr marL="285750" indent="-285750">
-              <a:buFont typeface="Arial" panose="020B0604020202020204" pitchFamily="34" charset="0"/>
-              <a:buChar char="•"/>
-            </a:pPr>
-            <a:r>
-              <a:rPr lang="fr-FR" dirty="0">
-                <a:solidFill>
-                  <a:schemeClr val="tx2">
-                    <a:lumMod val="75000"/>
-                    <a:lumOff val="25000"/>
-                  </a:schemeClr>
-                </a:solidFill>
-              </a:rPr>
-              <a:t>Accidents</a:t>
-            </a:r>
-          </a:p>
-          <a:p>
-            <a:pPr marL="285750" indent="-285750">
-              <a:buFont typeface="Arial" panose="020B0604020202020204" pitchFamily="34" charset="0"/>
-              <a:buChar char="•"/>
-            </a:pPr>
-            <a:r>
-              <a:rPr lang="fr-FR" dirty="0">
-                <a:solidFill>
-                  <a:schemeClr val="tx2">
-                    <a:lumMod val="75000"/>
-                    <a:lumOff val="25000"/>
-                  </a:schemeClr>
-                </a:solidFill>
-              </a:rPr>
-              <a:t>Désaturation</a:t>
-            </a:r>
-          </a:p>
           <a:p>
             <a:r>
               <a:rPr lang="fr-FR" dirty="0">
@@ -4008,6 +3949,177 @@
                 </a:solidFill>
               </a:rPr>
               <a:t>Dans le cadre de la pratique</a:t>
+            </a:r>
+          </a:p>
+        </p:txBody>
+      </p:sp>
+      <p:sp>
+        <p:nvSpPr>
+          <p:cNvPr id="6" name="ZoneTexte 5">
+            <a:extLst>
+              <a:ext uri="{FF2B5EF4-FFF2-40B4-BE49-F238E27FC236}">
+                <a16:creationId xmlns:a16="http://schemas.microsoft.com/office/drawing/2014/main" id="{E17DEE83-7E0B-789D-26A7-95BBF1C9C4CF}"/>
+              </a:ext>
+            </a:extLst>
+          </p:cNvPr>
+          <p:cNvSpPr txBox="1"/>
+          <p:nvPr/>
+        </p:nvSpPr>
+        <p:spPr>
+          <a:xfrm>
+            <a:off x="8199713" y="4906769"/>
+            <a:ext cx="3022687" cy="1477328"/>
+          </a:xfrm>
+          <a:prstGeom prst="rect">
+            <a:avLst/>
+          </a:prstGeom>
+          <a:noFill/>
+        </p:spPr>
+        <p:txBody>
+          <a:bodyPr wrap="none" rtlCol="0">
+            <a:spAutoFit/>
+          </a:bodyPr>
+          <a:lstStyle/>
+          <a:p>
+            <a:r>
+              <a:rPr lang="fr-FR" dirty="0"/>
+              <a:t>Logistique</a:t>
+            </a:r>
+          </a:p>
+          <a:p>
+            <a:r>
+              <a:rPr lang="fr-FR" dirty="0"/>
+              <a:t>Humain: 1 / séance</a:t>
+            </a:r>
+          </a:p>
+          <a:p>
+            <a:r>
+              <a:rPr lang="fr-FR" dirty="0"/>
+              <a:t>Lieu: salle/bateau</a:t>
+            </a:r>
+          </a:p>
+          <a:p>
+            <a:r>
+              <a:rPr lang="fr-FR" dirty="0"/>
+              <a:t>Matériel: tableau/ vidéo conf</a:t>
+            </a:r>
+          </a:p>
+          <a:p>
+            <a:r>
+              <a:rPr lang="fr-FR" dirty="0" err="1"/>
+              <a:t>powerpoint</a:t>
+            </a:r>
+            <a:endParaRPr lang="fr-FR" dirty="0"/>
+          </a:p>
+        </p:txBody>
+      </p:sp>
+      <p:sp>
+        <p:nvSpPr>
+          <p:cNvPr id="7" name="ZoneTexte 6">
+            <a:extLst>
+              <a:ext uri="{FF2B5EF4-FFF2-40B4-BE49-F238E27FC236}">
+                <a16:creationId xmlns:a16="http://schemas.microsoft.com/office/drawing/2014/main" id="{4567C5E7-B554-E2AD-D1EA-965F5C78DBFF}"/>
+              </a:ext>
+            </a:extLst>
+          </p:cNvPr>
+          <p:cNvSpPr txBox="1"/>
+          <p:nvPr/>
+        </p:nvSpPr>
+        <p:spPr>
+          <a:xfrm>
+            <a:off x="4173262" y="4906769"/>
+            <a:ext cx="2460684" cy="646331"/>
+          </a:xfrm>
+          <a:prstGeom prst="rect">
+            <a:avLst/>
+          </a:prstGeom>
+          <a:solidFill>
+            <a:schemeClr val="accent3">
+              <a:lumMod val="20000"/>
+              <a:lumOff val="80000"/>
+            </a:schemeClr>
+          </a:solidFill>
+          <a:ln>
+            <a:solidFill>
+              <a:schemeClr val="accent1"/>
+            </a:solidFill>
+          </a:ln>
+        </p:spPr>
+        <p:txBody>
+          <a:bodyPr wrap="square" rtlCol="0">
+            <a:spAutoFit/>
+          </a:bodyPr>
+          <a:lstStyle/>
+          <a:p>
+            <a:pPr algn="ctr"/>
+            <a:r>
+              <a:rPr lang="fr-FR" sz="2000" dirty="0"/>
+              <a:t>Planification</a:t>
+            </a:r>
+          </a:p>
+          <a:p>
+            <a:pPr marL="285750" indent="-285750">
+              <a:buFont typeface="Arial" panose="020B0604020202020204" pitchFamily="34" charset="0"/>
+              <a:buChar char="•"/>
+            </a:pPr>
+            <a:r>
+              <a:rPr lang="fr-FR" sz="1600" dirty="0"/>
+              <a:t>Sur bateau</a:t>
+            </a:r>
+          </a:p>
+        </p:txBody>
+      </p:sp>
+      <p:sp>
+        <p:nvSpPr>
+          <p:cNvPr id="9" name="ZoneTexte 8">
+            <a:extLst>
+              <a:ext uri="{FF2B5EF4-FFF2-40B4-BE49-F238E27FC236}">
+                <a16:creationId xmlns:a16="http://schemas.microsoft.com/office/drawing/2014/main" id="{2A40D109-37F0-017B-36BD-569C97BB08A7}"/>
+              </a:ext>
+            </a:extLst>
+          </p:cNvPr>
+          <p:cNvSpPr txBox="1"/>
+          <p:nvPr/>
+        </p:nvSpPr>
+        <p:spPr>
+          <a:xfrm>
+            <a:off x="453462" y="5574328"/>
+            <a:ext cx="1672253" cy="646331"/>
+          </a:xfrm>
+          <a:prstGeom prst="rect">
+            <a:avLst/>
+          </a:prstGeom>
+          <a:noFill/>
+        </p:spPr>
+        <p:txBody>
+          <a:bodyPr wrap="none" rtlCol="0">
+            <a:spAutoFit/>
+          </a:bodyPr>
+          <a:lstStyle/>
+          <a:p>
+            <a:r>
+              <a:rPr lang="fr-FR" dirty="0">
+                <a:solidFill>
+                  <a:schemeClr val="tx2">
+                    <a:lumMod val="75000"/>
+                    <a:lumOff val="25000"/>
+                  </a:schemeClr>
+                </a:solidFill>
+              </a:rPr>
+              <a:t>Durée</a:t>
+            </a:r>
+          </a:p>
+          <a:p>
+            <a:r>
+              <a:rPr lang="fr-FR" dirty="0">
+                <a:solidFill>
+                  <a:schemeClr val="tx2">
+                    <a:lumMod val="75000"/>
+                    <a:lumOff val="25000"/>
+                  </a:schemeClr>
+                </a:solidFill>
+              </a:rPr>
+              <a:t>6 séances  (9h)</a:t>
             </a:r>
           </a:p>
         </p:txBody>

--- a/ppt/theorie-n2.pptx
+++ b/ppt/theorie-n2.pptx
@@ -259,7 +259,7 @@
           <a:p>
             <a:fld id="{0C0058DA-9833-564B-95FE-A7F9C1C7E468}" type="datetimeFigureOut">
               <a:rPr lang="fr-FR" smtClean="0"/>
-              <a:t>05/02/2026</a:t>
+              <a:t>12/02/2026</a:t>
             </a:fld>
             <a:endParaRPr lang="fr-FR"/>
           </a:p>
@@ -457,7 +457,7 @@
           <a:p>
             <a:fld id="{0C0058DA-9833-564B-95FE-A7F9C1C7E468}" type="datetimeFigureOut">
               <a:rPr lang="fr-FR" smtClean="0"/>
-              <a:t>05/02/2026</a:t>
+              <a:t>12/02/2026</a:t>
             </a:fld>
             <a:endParaRPr lang="fr-FR"/>
           </a:p>
@@ -665,7 +665,7 @@
           <a:p>
             <a:fld id="{0C0058DA-9833-564B-95FE-A7F9C1C7E468}" type="datetimeFigureOut">
               <a:rPr lang="fr-FR" smtClean="0"/>
-              <a:t>05/02/2026</a:t>
+              <a:t>12/02/2026</a:t>
             </a:fld>
             <a:endParaRPr lang="fr-FR"/>
           </a:p>
@@ -863,7 +863,7 @@
           <a:p>
             <a:fld id="{0C0058DA-9833-564B-95FE-A7F9C1C7E468}" type="datetimeFigureOut">
               <a:rPr lang="fr-FR" smtClean="0"/>
-              <a:t>05/02/2026</a:t>
+              <a:t>12/02/2026</a:t>
             </a:fld>
             <a:endParaRPr lang="fr-FR"/>
           </a:p>
@@ -1138,7 +1138,7 @@
           <a:p>
             <a:fld id="{0C0058DA-9833-564B-95FE-A7F9C1C7E468}" type="datetimeFigureOut">
               <a:rPr lang="fr-FR" smtClean="0"/>
-              <a:t>05/02/2026</a:t>
+              <a:t>12/02/2026</a:t>
             </a:fld>
             <a:endParaRPr lang="fr-FR"/>
           </a:p>
@@ -1403,7 +1403,7 @@
           <a:p>
             <a:fld id="{0C0058DA-9833-564B-95FE-A7F9C1C7E468}" type="datetimeFigureOut">
               <a:rPr lang="fr-FR" smtClean="0"/>
-              <a:t>05/02/2026</a:t>
+              <a:t>12/02/2026</a:t>
             </a:fld>
             <a:endParaRPr lang="fr-FR"/>
           </a:p>
@@ -1815,7 +1815,7 @@
           <a:p>
             <a:fld id="{0C0058DA-9833-564B-95FE-A7F9C1C7E468}" type="datetimeFigureOut">
               <a:rPr lang="fr-FR" smtClean="0"/>
-              <a:t>05/02/2026</a:t>
+              <a:t>12/02/2026</a:t>
             </a:fld>
             <a:endParaRPr lang="fr-FR"/>
           </a:p>
@@ -1956,7 +1956,7 @@
           <a:p>
             <a:fld id="{0C0058DA-9833-564B-95FE-A7F9C1C7E468}" type="datetimeFigureOut">
               <a:rPr lang="fr-FR" smtClean="0"/>
-              <a:t>05/02/2026</a:t>
+              <a:t>12/02/2026</a:t>
             </a:fld>
             <a:endParaRPr lang="fr-FR"/>
           </a:p>
@@ -2069,7 +2069,7 @@
           <a:p>
             <a:fld id="{0C0058DA-9833-564B-95FE-A7F9C1C7E468}" type="datetimeFigureOut">
               <a:rPr lang="fr-FR" smtClean="0"/>
-              <a:t>05/02/2026</a:t>
+              <a:t>12/02/2026</a:t>
             </a:fld>
             <a:endParaRPr lang="fr-FR"/>
           </a:p>
@@ -2380,7 +2380,7 @@
           <a:p>
             <a:fld id="{0C0058DA-9833-564B-95FE-A7F9C1C7E468}" type="datetimeFigureOut">
               <a:rPr lang="fr-FR" smtClean="0"/>
-              <a:t>05/02/2026</a:t>
+              <a:t>12/02/2026</a:t>
             </a:fld>
             <a:endParaRPr lang="fr-FR"/>
           </a:p>
@@ -2668,7 +2668,7 @@
           <a:p>
             <a:fld id="{0C0058DA-9833-564B-95FE-A7F9C1C7E468}" type="datetimeFigureOut">
               <a:rPr lang="fr-FR" smtClean="0"/>
-              <a:t>05/02/2026</a:t>
+              <a:t>12/02/2026</a:t>
             </a:fld>
             <a:endParaRPr lang="fr-FR"/>
           </a:p>
@@ -2909,7 +2909,7 @@
           <a:p>
             <a:fld id="{0C0058DA-9833-564B-95FE-A7F9C1C7E468}" type="datetimeFigureOut">
               <a:rPr lang="fr-FR" smtClean="0"/>
-              <a:t>05/02/2026</a:t>
+              <a:t>12/02/2026</a:t>
             </a:fld>
             <a:endParaRPr lang="fr-FR"/>
           </a:p>
@@ -3350,8 +3350,8 @@
         </p:nvSpPr>
         <p:spPr>
           <a:xfrm>
-            <a:off x="1750711" y="0"/>
-            <a:ext cx="9144000" cy="869058"/>
+            <a:off x="6096000" y="0"/>
+            <a:ext cx="5904544" cy="869058"/>
           </a:xfrm>
         </p:spPr>
         <p:txBody>
@@ -3381,8 +3381,8 @@
         </p:nvSpPr>
         <p:spPr>
           <a:xfrm>
-            <a:off x="4206313" y="869057"/>
-            <a:ext cx="2409639" cy="1384995"/>
+            <a:off x="222105" y="1927517"/>
+            <a:ext cx="2409639" cy="1446550"/>
           </a:xfrm>
           <a:prstGeom prst="rect">
             <a:avLst/>
@@ -3408,7 +3408,7 @@
             <a:pPr algn="ctr"/>
             <a:r>
               <a:rPr lang="fr-FR" sz="2000" dirty="0"/>
-              <a:t>Physique (2 / 2h)</a:t>
+              <a:t>Théorie de l’activité (2 / 1h)</a:t>
             </a:r>
           </a:p>
           <a:p>
@@ -3441,16 +3441,6 @@
               <a:t>Consommation</a:t>
             </a:r>
           </a:p>
-          <a:p>
-            <a:pPr marL="285750" indent="-285750">
-              <a:buFont typeface="Arial" panose="020B0604020202020204" pitchFamily="34" charset="0"/>
-              <a:buChar char="•"/>
-            </a:pPr>
-            <a:r>
-              <a:rPr lang="fr-FR" sz="1600" dirty="0"/>
-              <a:t>Autonomie</a:t>
-            </a:r>
-          </a:p>
         </p:txBody>
       </p:sp>
       <p:sp>
@@ -3467,7 +3457,7 @@
         </p:nvSpPr>
         <p:spPr>
           <a:xfrm>
-            <a:off x="453462" y="869057"/>
+            <a:off x="222108" y="178786"/>
             <a:ext cx="2306914" cy="1631216"/>
           </a:xfrm>
           <a:prstGeom prst="rect">
@@ -3563,7 +3553,7 @@
         </p:nvSpPr>
         <p:spPr>
           <a:xfrm>
-            <a:off x="7312951" y="869057"/>
+            <a:off x="222105" y="3491582"/>
             <a:ext cx="2634439" cy="1631216"/>
           </a:xfrm>
           <a:prstGeom prst="rect">
@@ -3659,7 +3649,7 @@
         </p:nvSpPr>
         <p:spPr>
           <a:xfrm>
-            <a:off x="526462" y="3167832"/>
+            <a:off x="3317072" y="203907"/>
             <a:ext cx="2213235" cy="2062103"/>
           </a:xfrm>
           <a:prstGeom prst="rect">
@@ -3686,7 +3676,7 @@
             <a:pPr algn="ctr"/>
             <a:r>
               <a:rPr lang="fr-FR" sz="2000" dirty="0"/>
-              <a:t>Accidents (4 / 2h)</a:t>
+              <a:t>Accidents (5 / 2h)</a:t>
             </a:r>
             <a:endParaRPr lang="fr-FR" dirty="0"/>
           </a:p>
@@ -3766,7 +3756,7 @@
         </p:nvSpPr>
         <p:spPr>
           <a:xfrm>
-            <a:off x="4155268" y="3220117"/>
+            <a:off x="3317072" y="2375288"/>
             <a:ext cx="2460684" cy="892552"/>
           </a:xfrm>
           <a:prstGeom prst="rect">
@@ -3793,7 +3783,7 @@
             <a:pPr algn="ctr"/>
             <a:r>
               <a:rPr lang="fr-FR" sz="2000" dirty="0"/>
-              <a:t>Matériel (5 / 1h)</a:t>
+              <a:t>Matériel (6 / 1h)</a:t>
             </a:r>
           </a:p>
           <a:p>
@@ -3832,7 +3822,7 @@
         </p:nvSpPr>
         <p:spPr>
           <a:xfrm>
-            <a:off x="7312951" y="3173950"/>
+            <a:off x="3317072" y="3408573"/>
             <a:ext cx="3388363" cy="1138773"/>
           </a:xfrm>
           <a:prstGeom prst="rect">
@@ -3859,7 +3849,7 @@
             <a:pPr algn="ctr"/>
             <a:r>
               <a:rPr lang="fr-FR" sz="2000" dirty="0"/>
-              <a:t>Comportement (6 / 1h)</a:t>
+              <a:t>Comportement (7 / 1h)</a:t>
             </a:r>
           </a:p>
           <a:p>
@@ -3896,10 +3886,10 @@
       </p:sp>
       <p:sp>
         <p:nvSpPr>
-          <p:cNvPr id="3" name="ZoneTexte 2">
-            <a:extLst>
-              <a:ext uri="{FF2B5EF4-FFF2-40B4-BE49-F238E27FC236}">
-                <a16:creationId xmlns:a16="http://schemas.microsoft.com/office/drawing/2014/main" id="{1F1C4017-F298-608C-6A44-819165083755}"/>
+          <p:cNvPr id="6" name="ZoneTexte 5">
+            <a:extLst>
+              <a:ext uri="{FF2B5EF4-FFF2-40B4-BE49-F238E27FC236}">
+                <a16:creationId xmlns:a16="http://schemas.microsoft.com/office/drawing/2014/main" id="{E17DEE83-7E0B-789D-26A7-95BBF1C9C4CF}"/>
               </a:ext>
             </a:extLst>
           </p:cNvPr>
@@ -3908,8 +3898,8 @@
         </p:nvSpPr>
         <p:spPr>
           <a:xfrm>
-            <a:off x="4139241" y="5725064"/>
-            <a:ext cx="3242362" cy="646331"/>
+            <a:off x="7253416" y="983098"/>
+            <a:ext cx="4613186" cy="1200329"/>
           </a:xfrm>
           <a:prstGeom prst="rect">
             <a:avLst/>
@@ -3923,15 +3913,8 @@
           <a:lstStyle/>
           <a:p>
             <a:r>
-              <a:rPr lang="fr-FR" dirty="0">
-                <a:solidFill>
-                  <a:schemeClr val="tx2">
-                    <a:lumMod val="75000"/>
-                    <a:lumOff val="25000"/>
-                  </a:schemeClr>
-                </a:solidFill>
-              </a:rPr>
-              <a:t>Planification / Orientation</a:t>
+              <a:rPr lang="fr-FR" dirty="0"/>
+              <a:t>Logistique</a:t>
             </a:r>
           </a:p>
           <a:p>
@@ -3940,25 +3923,43 @@
               <a:buChar char="•"/>
             </a:pPr>
             <a:r>
-              <a:rPr lang="fr-FR" dirty="0">
-                <a:solidFill>
-                  <a:schemeClr val="tx2">
-                    <a:lumMod val="75000"/>
-                    <a:lumOff val="25000"/>
-                  </a:schemeClr>
-                </a:solidFill>
-              </a:rPr>
-              <a:t>Dans le cadre de la pratique</a:t>
-            </a:r>
-          </a:p>
-        </p:txBody>
-      </p:sp>
-      <p:sp>
-        <p:nvSpPr>
-          <p:cNvPr id="6" name="ZoneTexte 5">
-            <a:extLst>
-              <a:ext uri="{FF2B5EF4-FFF2-40B4-BE49-F238E27FC236}">
-                <a16:creationId xmlns:a16="http://schemas.microsoft.com/office/drawing/2014/main" id="{E17DEE83-7E0B-789D-26A7-95BBF1C9C4CF}"/>
+              <a:rPr lang="fr-FR" dirty="0"/>
+              <a:t>Humain: 1 / séance</a:t>
+            </a:r>
+          </a:p>
+          <a:p>
+            <a:pPr marL="285750" indent="-285750">
+              <a:buFont typeface="Arial" panose="020B0604020202020204" pitchFamily="34" charset="0"/>
+              <a:buChar char="•"/>
+            </a:pPr>
+            <a:r>
+              <a:rPr lang="fr-FR" dirty="0"/>
+              <a:t>Lieu: salle/bateau</a:t>
+            </a:r>
+          </a:p>
+          <a:p>
+            <a:pPr marL="285750" indent="-285750">
+              <a:buFont typeface="Arial" panose="020B0604020202020204" pitchFamily="34" charset="0"/>
+              <a:buChar char="•"/>
+            </a:pPr>
+            <a:r>
+              <a:rPr lang="fr-FR" dirty="0"/>
+              <a:t>Matériel: tableau/ vidéo conf / </a:t>
+            </a:r>
+            <a:r>
+              <a:rPr lang="fr-FR" dirty="0" err="1"/>
+              <a:t>powerpoint</a:t>
+            </a:r>
+            <a:endParaRPr lang="fr-FR" dirty="0"/>
+          </a:p>
+        </p:txBody>
+      </p:sp>
+      <p:sp>
+        <p:nvSpPr>
+          <p:cNvPr id="7" name="ZoneTexte 6">
+            <a:extLst>
+              <a:ext uri="{FF2B5EF4-FFF2-40B4-BE49-F238E27FC236}">
+                <a16:creationId xmlns:a16="http://schemas.microsoft.com/office/drawing/2014/main" id="{4567C5E7-B554-E2AD-D1EA-965F5C78DBFF}"/>
               </a:ext>
             </a:extLst>
           </p:cNvPr>
@@ -3967,68 +3968,8 @@
         </p:nvSpPr>
         <p:spPr>
           <a:xfrm>
-            <a:off x="8199713" y="4906769"/>
-            <a:ext cx="3022687" cy="1477328"/>
-          </a:xfrm>
-          <a:prstGeom prst="rect">
-            <a:avLst/>
-          </a:prstGeom>
-          <a:noFill/>
-        </p:spPr>
-        <p:txBody>
-          <a:bodyPr wrap="none" rtlCol="0">
-            <a:spAutoFit/>
-          </a:bodyPr>
-          <a:lstStyle/>
-          <a:p>
-            <a:r>
-              <a:rPr lang="fr-FR" dirty="0"/>
-              <a:t>Logistique</a:t>
-            </a:r>
-          </a:p>
-          <a:p>
-            <a:r>
-              <a:rPr lang="fr-FR" dirty="0"/>
-              <a:t>Humain: 1 / séance</a:t>
-            </a:r>
-          </a:p>
-          <a:p>
-            <a:r>
-              <a:rPr lang="fr-FR" dirty="0"/>
-              <a:t>Lieu: salle/bateau</a:t>
-            </a:r>
-          </a:p>
-          <a:p>
-            <a:r>
-              <a:rPr lang="fr-FR" dirty="0"/>
-              <a:t>Matériel: tableau/ vidéo conf</a:t>
-            </a:r>
-          </a:p>
-          <a:p>
-            <a:r>
-              <a:rPr lang="fr-FR" dirty="0" err="1"/>
-              <a:t>powerpoint</a:t>
-            </a:r>
-            <a:endParaRPr lang="fr-FR" dirty="0"/>
-          </a:p>
-        </p:txBody>
-      </p:sp>
-      <p:sp>
-        <p:nvSpPr>
-          <p:cNvPr id="7" name="ZoneTexte 6">
-            <a:extLst>
-              <a:ext uri="{FF2B5EF4-FFF2-40B4-BE49-F238E27FC236}">
-                <a16:creationId xmlns:a16="http://schemas.microsoft.com/office/drawing/2014/main" id="{4567C5E7-B554-E2AD-D1EA-965F5C78DBFF}"/>
-              </a:ext>
-            </a:extLst>
-          </p:cNvPr>
-          <p:cNvSpPr txBox="1"/>
-          <p:nvPr/>
-        </p:nvSpPr>
-        <p:spPr>
-          <a:xfrm>
-            <a:off x="4173262" y="4906769"/>
-            <a:ext cx="2460684" cy="646331"/>
+            <a:off x="3317071" y="4670308"/>
+            <a:ext cx="3388363" cy="646331"/>
           </a:xfrm>
           <a:prstGeom prst="rect">
             <a:avLst/>
@@ -4054,7 +3995,7 @@
             <a:pPr algn="ctr"/>
             <a:r>
               <a:rPr lang="fr-FR" sz="2000" dirty="0"/>
-              <a:t>Planification</a:t>
+              <a:t>Planification / Orientation</a:t>
             </a:r>
           </a:p>
           <a:p>
@@ -4083,7 +4024,7 @@
         </p:nvSpPr>
         <p:spPr>
           <a:xfrm>
-            <a:off x="453462" y="5574328"/>
+            <a:off x="7253416" y="2495320"/>
             <a:ext cx="1672253" cy="646331"/>
           </a:xfrm>
           <a:prstGeom prst="rect">
@@ -4119,7 +4060,162 @@
                   </a:schemeClr>
                 </a:solidFill>
               </a:rPr>
-              <a:t>6 séances  (9h)</a:t>
+              <a:t>7 séances  (9h)</a:t>
+            </a:r>
+          </a:p>
+        </p:txBody>
+      </p:sp>
+      <p:sp>
+        <p:nvSpPr>
+          <p:cNvPr id="13" name="ZoneTexte 12">
+            <a:extLst>
+              <a:ext uri="{FF2B5EF4-FFF2-40B4-BE49-F238E27FC236}">
+                <a16:creationId xmlns:a16="http://schemas.microsoft.com/office/drawing/2014/main" id="{F8A3829E-C733-E8A8-EA45-6D42353C1675}"/>
+              </a:ext>
+            </a:extLst>
+          </p:cNvPr>
+          <p:cNvSpPr txBox="1"/>
+          <p:nvPr/>
+        </p:nvSpPr>
+        <p:spPr>
+          <a:xfrm>
+            <a:off x="262837" y="5240313"/>
+            <a:ext cx="2409639" cy="1138773"/>
+          </a:xfrm>
+          <a:prstGeom prst="rect">
+            <a:avLst/>
+          </a:prstGeom>
+          <a:solidFill>
+            <a:schemeClr val="accent3">
+              <a:lumMod val="20000"/>
+              <a:lumOff val="80000"/>
+            </a:schemeClr>
+          </a:solidFill>
+          <a:ln>
+            <a:solidFill>
+              <a:schemeClr val="accent1"/>
+            </a:solidFill>
+          </a:ln>
+        </p:spPr>
+        <p:txBody>
+          <a:bodyPr wrap="square" rtlCol="0">
+            <a:spAutoFit/>
+          </a:bodyPr>
+          <a:lstStyle/>
+          <a:p>
+            <a:pPr algn="ctr"/>
+            <a:r>
+              <a:rPr lang="fr-FR" sz="2000" dirty="0"/>
+              <a:t>Autonomie (4 / 1h)</a:t>
+            </a:r>
+          </a:p>
+          <a:p>
+            <a:pPr marL="285750" indent="-285750">
+              <a:buFont typeface="Arial" panose="020B0604020202020204" pitchFamily="34" charset="0"/>
+              <a:buChar char="•"/>
+            </a:pPr>
+            <a:r>
+              <a:rPr lang="fr-FR" sz="1600" dirty="0"/>
+              <a:t>Autonomie</a:t>
+            </a:r>
+          </a:p>
+          <a:p>
+            <a:pPr marL="285750" indent="-285750">
+              <a:buFont typeface="Arial" panose="020B0604020202020204" pitchFamily="34" charset="0"/>
+              <a:buChar char="•"/>
+            </a:pPr>
+            <a:r>
+              <a:rPr lang="fr-FR" sz="1600" dirty="0"/>
+              <a:t>Sécurité</a:t>
+            </a:r>
+          </a:p>
+          <a:p>
+            <a:pPr marL="285750" indent="-285750">
+              <a:buFont typeface="Arial" panose="020B0604020202020204" pitchFamily="34" charset="0"/>
+              <a:buChar char="•"/>
+            </a:pPr>
+            <a:r>
+              <a:rPr lang="fr-FR" sz="1600" dirty="0"/>
+              <a:t>Panne d’air</a:t>
+            </a:r>
+          </a:p>
+        </p:txBody>
+      </p:sp>
+      <p:sp>
+        <p:nvSpPr>
+          <p:cNvPr id="14" name="ZoneTexte 13">
+            <a:extLst>
+              <a:ext uri="{FF2B5EF4-FFF2-40B4-BE49-F238E27FC236}">
+                <a16:creationId xmlns:a16="http://schemas.microsoft.com/office/drawing/2014/main" id="{A736ACB6-CF34-77DE-B54C-B9650EE359B0}"/>
+              </a:ext>
+            </a:extLst>
+          </p:cNvPr>
+          <p:cNvSpPr txBox="1"/>
+          <p:nvPr/>
+        </p:nvSpPr>
+        <p:spPr>
+          <a:xfrm>
+            <a:off x="3459598" y="5765148"/>
+            <a:ext cx="3491661" cy="369332"/>
+          </a:xfrm>
+          <a:prstGeom prst="rect">
+            <a:avLst/>
+          </a:prstGeom>
+          <a:noFill/>
+        </p:spPr>
+        <p:txBody>
+          <a:bodyPr wrap="none" rtlCol="0">
+            <a:spAutoFit/>
+          </a:bodyPr>
+          <a:lstStyle/>
+          <a:p>
+            <a:r>
+              <a:rPr lang="fr-FR" dirty="0"/>
+              <a:t>Time line pour placer les séances</a:t>
+            </a:r>
+          </a:p>
+        </p:txBody>
+      </p:sp>
+      <p:sp>
+        <p:nvSpPr>
+          <p:cNvPr id="15" name="ZoneTexte 14">
+            <a:extLst>
+              <a:ext uri="{FF2B5EF4-FFF2-40B4-BE49-F238E27FC236}">
+                <a16:creationId xmlns:a16="http://schemas.microsoft.com/office/drawing/2014/main" id="{B8EB101B-DBF6-7FEC-416F-C7C1F7CBD64F}"/>
+              </a:ext>
+            </a:extLst>
+          </p:cNvPr>
+          <p:cNvSpPr txBox="1"/>
+          <p:nvPr/>
+        </p:nvSpPr>
+        <p:spPr>
+          <a:xfrm>
+            <a:off x="7799942" y="3822853"/>
+            <a:ext cx="3651577" cy="923330"/>
+          </a:xfrm>
+          <a:prstGeom prst="rect">
+            <a:avLst/>
+          </a:prstGeom>
+          <a:noFill/>
+        </p:spPr>
+        <p:txBody>
+          <a:bodyPr wrap="none" rtlCol="0">
+            <a:spAutoFit/>
+          </a:bodyPr>
+          <a:lstStyle/>
+          <a:p>
+            <a:r>
+              <a:rPr lang="fr-FR" dirty="0"/>
+              <a:t>Eval = 2/3 questions orale au début</a:t>
+            </a:r>
+          </a:p>
+          <a:p>
+            <a:endParaRPr lang="fr-FR" dirty="0"/>
+          </a:p>
+          <a:p>
+            <a:r>
+              <a:rPr lang="fr-FR" dirty="0"/>
+              <a:t>Quiz &amp;0/12 questions au final</a:t>
             </a:r>
           </a:p>
         </p:txBody>
